--- a/representative_process_flow.pptx
+++ b/representative_process_flow.pptx
@@ -4228,7 +4228,7 @@
         <p:spPr>
           <a:xfrm>
             <a:off x="6944476" y="1984248"/>
-            <a:ext cx="1294921" cy="1188720"/>
+            <a:ext cx="1489159" cy="1188720"/>
           </a:xfrm>
           <a:prstGeom prst="diamond">
             <a:avLst/>
@@ -4257,8 +4257,20 @@
           </a:fontRef>
         </p:style>
         <p:txBody>
-          <a:bodyPr rtlCol="0" anchor="ctr" wrap="square" lIns="137160" rIns="137160"/>
-          <a:lstStyle/>
+          <a:bodyPr rtlCol="0" anchor="ctr" wrap="square" lIns="36576" rIns="36576" tIns="54864" bIns="54864"/>
+          <a:lstStyle/>
+          <a:p>
+            <a:pPr algn="ctr"/>
+            <a:r>
+              <a:rPr sz="819" b="1" i="0">
+                <a:solidFill>
+                  <a:srgbClr val="0066CC"/>
+                </a:solidFill>
+                <a:latin typeface="Inter"/>
+              </a:rPr>
+              <a:t>GATE</a:t>
+            </a:r>
+          </a:p>
           <a:p>
             <a:pPr algn="ctr">
               <a:spcAft>
@@ -4268,23 +4280,12 @@
             <a:r>
               <a:rPr sz="850" b="1" i="0">
                 <a:solidFill>
-                  <a:srgbClr val="0066CC"/>
+                  <a:srgbClr val="0F172A"/>
                 </a:solidFill>
                 <a:latin typeface="Inter"/>
               </a:rPr>
-              <a:t>DECISION GATE</a:t>
-            </a:r>
-          </a:p>
-          <a:p>
-            <a:pPr algn="ctr"/>
-            <a:r>
-              <a:rPr sz="1050" b="1" i="0">
-                <a:solidFill>
-                  <a:srgbClr val="0F172A"/>
-                </a:solidFill>
-                <a:latin typeface="Inter"/>
-              </a:rPr>
-              <a:t>Quality Gate &amp; SPC</a:t>
+              <a:t>QUALITY GATE
+&amp; SPC</a:t>
             </a:r>
           </a:p>
         </p:txBody>
@@ -4297,8 +4298,8 @@
         </p:nvSpPr>
         <p:spPr>
           <a:xfrm>
-            <a:off x="8266829" y="2468879"/>
-            <a:ext cx="146304" cy="219456"/>
+            <a:off x="8470211" y="2468879"/>
+            <a:ext cx="548640" cy="219456"/>
           </a:xfrm>
           <a:prstGeom prst="rightArrow">
             <a:avLst/>
@@ -4340,8 +4341,8 @@
         </p:nvSpPr>
         <p:spPr>
           <a:xfrm>
-            <a:off x="8175389" y="2057400"/>
-            <a:ext cx="548640" cy="219456"/>
+            <a:off x="8506787" y="2304288"/>
+            <a:ext cx="475488" cy="201168"/>
           </a:xfrm>
           <a:prstGeom prst="roundRect">
             <a:avLst/>
@@ -4392,7 +4393,7 @@
         </p:nvSpPr>
         <p:spPr>
           <a:xfrm>
-            <a:off x="8440565" y="1984248"/>
+            <a:off x="9055427" y="1984248"/>
             <a:ext cx="1294921" cy="1188720"/>
           </a:xfrm>
           <a:prstGeom prst="roundRect">
@@ -4437,7 +4438,7 @@
         </p:nvSpPr>
         <p:spPr>
           <a:xfrm>
-            <a:off x="8440565" y="1984248"/>
+            <a:off x="9055427" y="1984248"/>
             <a:ext cx="1294921" cy="256032"/>
           </a:xfrm>
           <a:prstGeom prst="rect">
@@ -4489,7 +4490,7 @@
         </p:nvSpPr>
         <p:spPr>
           <a:xfrm>
-            <a:off x="8513717" y="2276856"/>
+            <a:off x="9128579" y="2276856"/>
             <a:ext cx="1148617" cy="859536"/>
           </a:xfrm>
           <a:prstGeom prst="rect">
@@ -4544,7 +4545,7 @@
         </p:nvSpPr>
         <p:spPr>
           <a:xfrm>
-            <a:off x="9762918" y="2468879"/>
+            <a:off x="10377780" y="2468879"/>
             <a:ext cx="146304" cy="219456"/>
           </a:xfrm>
           <a:prstGeom prst="rightArrow">
@@ -4587,7 +4588,7 @@
         </p:nvSpPr>
         <p:spPr>
           <a:xfrm>
-            <a:off x="9936654" y="1984248"/>
+            <a:off x="10551516" y="1984248"/>
             <a:ext cx="1294921" cy="1188720"/>
           </a:xfrm>
           <a:prstGeom prst="roundRect">
@@ -4632,7 +4633,7 @@
         </p:nvSpPr>
         <p:spPr>
           <a:xfrm>
-            <a:off x="9936654" y="1984248"/>
+            <a:off x="10551516" y="1984248"/>
             <a:ext cx="1294921" cy="256032"/>
           </a:xfrm>
           <a:prstGeom prst="rect">
@@ -4684,7 +4685,7 @@
         </p:nvSpPr>
         <p:spPr>
           <a:xfrm>
-            <a:off x="10009806" y="2276856"/>
+            <a:off x="10624668" y="2276856"/>
             <a:ext cx="1148617" cy="859536"/>
           </a:xfrm>
           <a:prstGeom prst="rect">
@@ -4739,7 +4740,7 @@
         </p:nvSpPr>
         <p:spPr>
           <a:xfrm>
-            <a:off x="7482208" y="3218687"/>
+            <a:off x="7579327" y="3218687"/>
             <a:ext cx="219456" cy="1673351"/>
           </a:xfrm>
           <a:prstGeom prst="downArrow">
@@ -4782,7 +4783,7 @@
         </p:nvSpPr>
         <p:spPr>
           <a:xfrm>
-            <a:off x="7738240" y="3310127"/>
+            <a:off x="7835359" y="3310127"/>
             <a:ext cx="1005840" cy="219456"/>
           </a:xfrm>
           <a:prstGeom prst="roundRect">
@@ -5225,8 +5226,8 @@
         </p:nvSpPr>
         <p:spPr>
           <a:xfrm>
-            <a:off x="10064670" y="4617720"/>
-            <a:ext cx="219456" cy="320040"/>
+            <a:off x="10064670" y="4434840"/>
+            <a:ext cx="219456" cy="502920"/>
           </a:xfrm>
           <a:prstGeom prst="upArrow">
             <a:avLst/>
@@ -5268,8 +5269,8 @@
         </p:nvSpPr>
         <p:spPr>
           <a:xfrm>
-            <a:off x="10302414" y="4526279"/>
-            <a:ext cx="1029745" cy="365760"/>
+            <a:off x="10320702" y="4507992"/>
+            <a:ext cx="1234440" cy="384048"/>
           </a:xfrm>
           <a:prstGeom prst="roundRect">
             <a:avLst/>
@@ -5277,7 +5278,7 @@
           <a:solidFill>
             <a:srgbClr val="EEF2FF"/>
           </a:solidFill>
-          <a:ln>
+          <a:ln w="12700">
             <a:solidFill>
               <a:srgbClr val="D97706"/>
             </a:solidFill>
@@ -5298,7 +5299,7 @@
           </a:fontRef>
         </p:style>
         <p:txBody>
-          <a:bodyPr rtlCol="0" anchor="ctr" wrap="square"/>
+          <a:bodyPr rtlCol="0" anchor="ctr" wrap="square" lIns="36576" rIns="36576" tIns="36576" bIns="36576"/>
           <a:lstStyle/>
           <a:p>
             <a:pPr algn="ctr"/>
@@ -5309,7 +5310,7 @@
                 </a:solidFill>
                 <a:latin typeface="Inter"/>
               </a:rPr>
-              <a:t>CLOSED-LOOP RE-ENTRY
+              <a:t>↺ RE-ENTRY LOOP
 Cleared for Confirmation</a:t>
             </a:r>
           </a:p>
@@ -5341,6 +5342,51 @@
         </p:nvSpPr>
         <p:spPr>
           <a:xfrm>
+            <a:off x="0" y="0"/>
+            <a:ext cx="12191695" cy="6858000"/>
+          </a:xfrm>
+          <a:prstGeom prst="rect">
+            <a:avLst/>
+          </a:prstGeom>
+          <a:solidFill>
+            <a:srgbClr val="0A162C"/>
+          </a:solidFill>
+          <a:ln>
+            <a:noFill/>
+          </a:ln>
+        </p:spPr>
+        <p:style>
+          <a:lnRef idx="1">
+            <a:schemeClr val="accent1"/>
+          </a:lnRef>
+          <a:fillRef idx="3">
+            <a:schemeClr val="accent1"/>
+          </a:fillRef>
+          <a:effectRef idx="2">
+            <a:schemeClr val="accent1"/>
+          </a:effectRef>
+          <a:fontRef idx="minor">
+            <a:schemeClr val="lt1"/>
+          </a:fontRef>
+        </p:style>
+        <p:txBody>
+          <a:bodyPr rtlCol="0" anchor="ctr"/>
+          <a:lstStyle/>
+          <a:p>
+            <a:pPr algn="ctr">
+              <a:defRPr/>
+            </a:pPr>
+          </a:p>
+        </p:txBody>
+      </p:sp>
+      <p:sp>
+        <p:nvSpPr>
+          <p:cNvPr id="3" name="Rectangle 2"/>
+          <p:cNvSpPr/>
+          <p:nvPr/>
+        </p:nvSpPr>
+        <p:spPr>
+          <a:xfrm>
             <a:off x="731520" y="347472"/>
             <a:ext cx="2011680" cy="237744"/>
           </a:xfrm>
@@ -5394,7 +5440,7 @@
       </p:sp>
       <p:sp>
         <p:nvSpPr>
-          <p:cNvPr id="3" name="TextBox 2"/>
+          <p:cNvPr id="4" name="TextBox 3"/>
           <p:cNvSpPr txBox="1"/>
           <p:nvPr/>
         </p:nvSpPr>
@@ -5433,7 +5479,7 @@
       </p:sp>
       <p:sp>
         <p:nvSpPr>
-          <p:cNvPr id="4" name="TextBox 3"/>
+          <p:cNvPr id="5" name="TextBox 4"/>
           <p:cNvSpPr txBox="1"/>
           <p:nvPr/>
         </p:nvSpPr>
@@ -5472,7 +5518,7 @@
       </p:sp>
       <p:sp>
         <p:nvSpPr>
-          <p:cNvPr id="5" name="Rectangle 4"/>
+          <p:cNvPr id="6" name="Rectangle 5"/>
           <p:cNvSpPr/>
           <p:nvPr/>
         </p:nvSpPr>
@@ -5515,7 +5561,7 @@
       </p:sp>
       <p:sp>
         <p:nvSpPr>
-          <p:cNvPr id="6" name="TextBox 5"/>
+          <p:cNvPr id="7" name="TextBox 6"/>
           <p:cNvSpPr txBox="1"/>
           <p:nvPr/>
         </p:nvSpPr>
@@ -5549,7 +5595,7 @@
       </p:sp>
       <p:sp>
         <p:nvSpPr>
-          <p:cNvPr id="7" name="TextBox 6"/>
+          <p:cNvPr id="8" name="TextBox 7"/>
           <p:cNvSpPr txBox="1"/>
           <p:nvPr/>
         </p:nvSpPr>
@@ -5584,7 +5630,7 @@
       </p:sp>
       <p:sp>
         <p:nvSpPr>
-          <p:cNvPr id="8" name="Rectangle 7"/>
+          <p:cNvPr id="9" name="Rectangle 8"/>
           <p:cNvSpPr/>
           <p:nvPr/>
         </p:nvSpPr>
@@ -5629,7 +5675,7 @@
       </p:sp>
       <p:sp>
         <p:nvSpPr>
-          <p:cNvPr id="9" name="TextBox 8"/>
+          <p:cNvPr id="10" name="TextBox 9"/>
           <p:cNvSpPr txBox="1"/>
           <p:nvPr/>
         </p:nvSpPr>
@@ -5711,7 +5757,7 @@
       </p:sp>
       <p:sp>
         <p:nvSpPr>
-          <p:cNvPr id="10" name="Right Arrow 9"/>
+          <p:cNvPr id="11" name="Right Arrow 10"/>
           <p:cNvSpPr/>
           <p:nvPr/>
         </p:nvSpPr>
@@ -5754,7 +5800,7 @@
       </p:sp>
       <p:sp>
         <p:nvSpPr>
-          <p:cNvPr id="11" name="Rectangle 10"/>
+          <p:cNvPr id="12" name="Rectangle 11"/>
           <p:cNvSpPr/>
           <p:nvPr/>
         </p:nvSpPr>
@@ -5799,7 +5845,7 @@
       </p:sp>
       <p:sp>
         <p:nvSpPr>
-          <p:cNvPr id="12" name="TextBox 11"/>
+          <p:cNvPr id="13" name="TextBox 12"/>
           <p:cNvSpPr txBox="1"/>
           <p:nvPr/>
         </p:nvSpPr>
@@ -5881,7 +5927,7 @@
       </p:sp>
       <p:sp>
         <p:nvSpPr>
-          <p:cNvPr id="13" name="Right Arrow 12"/>
+          <p:cNvPr id="14" name="Right Arrow 13"/>
           <p:cNvSpPr/>
           <p:nvPr/>
         </p:nvSpPr>
@@ -5924,7 +5970,7 @@
       </p:sp>
       <p:sp>
         <p:nvSpPr>
-          <p:cNvPr id="14" name="Rectangle 13"/>
+          <p:cNvPr id="15" name="Rectangle 14"/>
           <p:cNvSpPr/>
           <p:nvPr/>
         </p:nvSpPr>
@@ -5969,7 +6015,7 @@
       </p:sp>
       <p:sp>
         <p:nvSpPr>
-          <p:cNvPr id="15" name="TextBox 14"/>
+          <p:cNvPr id="16" name="TextBox 15"/>
           <p:cNvSpPr txBox="1"/>
           <p:nvPr/>
         </p:nvSpPr>
@@ -6051,7 +6097,7 @@
       </p:sp>
       <p:sp>
         <p:nvSpPr>
-          <p:cNvPr id="16" name="Right Arrow 15"/>
+          <p:cNvPr id="17" name="Right Arrow 16"/>
           <p:cNvSpPr/>
           <p:nvPr/>
         </p:nvSpPr>
@@ -6094,7 +6140,7 @@
       </p:sp>
       <p:sp>
         <p:nvSpPr>
-          <p:cNvPr id="17" name="Rectangle 16"/>
+          <p:cNvPr id="18" name="Rectangle 17"/>
           <p:cNvSpPr/>
           <p:nvPr/>
         </p:nvSpPr>
@@ -6139,7 +6185,7 @@
       </p:sp>
       <p:sp>
         <p:nvSpPr>
-          <p:cNvPr id="18" name="TextBox 17"/>
+          <p:cNvPr id="19" name="TextBox 18"/>
           <p:cNvSpPr txBox="1"/>
           <p:nvPr/>
         </p:nvSpPr>
